--- a/classes/parte-2-criptografia-aplicada/050-criptografia-de-curva-eliptica-ecc/clase-050-presentacion.pptx
+++ b/classes/parte-2-criptografia-aplicada/050-criptografia-de-curva-eliptica-ecc/clase-050-presentacion.pptx
@@ -17,6 +17,9 @@
     <p:sldId id="265" r:id="rId16"/>
     <p:sldId id="266" r:id="rId17"/>
     <p:sldId id="267" r:id="rId18"/>
+    <p:sldId id="268" r:id="rId19"/>
+    <p:sldId id="269" r:id="rId20"/>
+    <p:sldId id="270" r:id="rId21"/>
   </p:sldIdLst>
   <p:sldSz cx="9144000" cy="6858000" type="screen4x3"/>
   <p:notesSz cx="6858000" cy="9144000"/>
@@ -3198,7 +3201,7 @@
                   <a:srgbClr val="0B3D2E"/>
                 </a:solidFill>
               </a:rPr>
-              <a:t>⚠️ Errores comunes</a:t>
+              <a:t>✍️ Ejercicios</a:t>
             </a:r>
           </a:p>
         </p:txBody>
@@ -3236,67 +3239,82 @@
                   <a:srgbClr val="22282E"/>
                 </a:solidFill>
               </a:rPr>
-              <a:t>•  Secretos ECDH distintos — Curvas o codificaciones distintas; usa la misma curva</a:t>
-            </a:r>
-          </a:p>
-          <a:p>
-            <a:pPr>
-              <a:spcAft>
-                <a:spcPts val="600"/>
-              </a:spcAft>
-            </a:pPr>
-            <a:r>
-              <a:rPr sz="1500">
-                <a:solidFill>
-                  <a:srgbClr val="22282E"/>
-                </a:solidFill>
-              </a:rPr>
-              <a:t>•  ECDSA roto por nonce reutilizado — Nonce k repetido revela la clave; usa RFC 6979 o Ed25519</a:t>
-            </a:r>
-          </a:p>
-          <a:p>
-            <a:pPr>
-              <a:spcAft>
-                <a:spcPts val="600"/>
-              </a:spcAft>
-            </a:pPr>
-            <a:r>
-              <a:rPr sz="1500">
-                <a:solidFill>
-                  <a:srgbClr val="22282E"/>
-                </a:solidFill>
-              </a:rPr>
-              <a:t>•  Punto público no validado — Riesgo de curva inválida; valida pertenencia a la curva</a:t>
-            </a:r>
-          </a:p>
-          <a:p>
-            <a:pPr>
-              <a:spcAft>
-                <a:spcPts val="600"/>
-              </a:spcAft>
-            </a:pPr>
-            <a:r>
-              <a:rPr sz="1500">
-                <a:solidFill>
-                  <a:srgbClr val="22282E"/>
-                </a:solidFill>
-              </a:rPr>
-              <a:t>•  Uso de curvas débiles/obsoletas — Elige P-256, P-384 o Curve25519</a:t>
-            </a:r>
-          </a:p>
-          <a:p>
-            <a:pPr>
-              <a:spcAft>
-                <a:spcPts val="600"/>
-              </a:spcAft>
-            </a:pPr>
-            <a:r>
-              <a:rPr sz="1500">
-                <a:solidFill>
-                  <a:srgbClr val="22282E"/>
-                </a:solidFill>
-              </a:rPr>
-              <a:t>•  Confundir clave de firma con clave de ECDH — Separa propósitos; no reutilices el par de claves</a:t>
+              <a:t>•  Explica con un dibujo la suma de dos puntos en una curva sobre los reales.</a:t>
+            </a:r>
+          </a:p>
+          <a:p>
+            <a:pPr>
+              <a:spcAft>
+                <a:spcPts val="600"/>
+              </a:spcAft>
+            </a:pPr>
+            <a:r>
+              <a:rPr sz="1500">
+                <a:solidFill>
+                  <a:srgbClr val="22282E"/>
+                </a:solidFill>
+              </a:rPr>
+              <a:t>•  ¿Por qué claves EC más pequeñas dan la misma seguridad que RSA grandes?</a:t>
+            </a:r>
+          </a:p>
+          <a:p>
+            <a:pPr>
+              <a:spcAft>
+                <a:spcPts val="600"/>
+              </a:spcAft>
+            </a:pPr>
+            <a:r>
+              <a:rPr sz="1500">
+                <a:solidFill>
+                  <a:srgbClr val="22282E"/>
+                </a:solidFill>
+              </a:rPr>
+              <a:t>•  Genera un secreto compartido con X25519 entre dos pares y verifica que coinciden.</a:t>
+            </a:r>
+          </a:p>
+          <a:p>
+            <a:pPr>
+              <a:spcAft>
+                <a:spcPts val="600"/>
+              </a:spcAft>
+            </a:pPr>
+            <a:r>
+              <a:rPr sz="1500">
+                <a:solidFill>
+                  <a:srgbClr val="22282E"/>
+                </a:solidFill>
+              </a:rPr>
+              <a:t>•  Investiga la polémica de la curva DualECDRBG y la confianza en parámetros.</a:t>
+            </a:r>
+          </a:p>
+          <a:p>
+            <a:pPr>
+              <a:spcAft>
+                <a:spcPts val="600"/>
+              </a:spcAft>
+            </a:pPr>
+            <a:r>
+              <a:rPr sz="1500">
+                <a:solidFill>
+                  <a:srgbClr val="22282E"/>
+                </a:solidFill>
+              </a:rPr>
+              <a:t>•  Compara Ed25519 con ECDSA en cuanto a determinismo y riesgo de nonce.</a:t>
+            </a:r>
+          </a:p>
+          <a:p>
+            <a:pPr>
+              <a:spcAft>
+                <a:spcPts val="600"/>
+              </a:spcAft>
+            </a:pPr>
+            <a:r>
+              <a:rPr sz="1500">
+                <a:solidFill>
+                  <a:srgbClr val="22282E"/>
+                </a:solidFill>
+              </a:rPr>
+              <a:t>•  ¿Por qué validar puntos recibidos evita ataques de curva inválida?</a:t>
             </a:r>
           </a:p>
         </p:txBody>
@@ -3347,7 +3365,7 @@
                   <a:srgbClr val="0B3D2E"/>
                 </a:solidFill>
               </a:rPr>
-              <a:t>❓ Preguntas frecuentes</a:t>
+              <a:t>📝 Reto verificable</a:t>
             </a:r>
           </a:p>
         </p:txBody>
@@ -3385,82 +3403,7 @@
                   <a:srgbClr val="22282E"/>
                 </a:solidFill>
               </a:rPr>
-              <a:t>•  ❓ ¿ECC o RSA?</a:t>
-            </a:r>
-          </a:p>
-          <a:p>
-            <a:pPr>
-              <a:spcAft>
-                <a:spcPts val="600"/>
-              </a:spcAft>
-            </a:pPr>
-            <a:r>
-              <a:rPr sz="1500">
-                <a:solidFill>
-                  <a:srgbClr val="22282E"/>
-                </a:solidFill>
-              </a:rPr>
-              <a:t>•  ECC para nuevos diseños: claves pequeñas, rápido, adoptado por TLS 1.3. RSA persiste por compatibilidad.</a:t>
-            </a:r>
-          </a:p>
-          <a:p>
-            <a:pPr>
-              <a:spcAft>
-                <a:spcPts val="600"/>
-              </a:spcAft>
-            </a:pPr>
-            <a:r>
-              <a:rPr sz="1500">
-                <a:solidFill>
-                  <a:srgbClr val="22282E"/>
-                </a:solidFill>
-              </a:rPr>
-              <a:t>•  ❓ ¿Curvas NIST o Curve25519?</a:t>
-            </a:r>
-          </a:p>
-          <a:p>
-            <a:pPr>
-              <a:spcAft>
-                <a:spcPts val="600"/>
-              </a:spcAft>
-            </a:pPr>
-            <a:r>
-              <a:rPr sz="1500">
-                <a:solidFill>
-                  <a:srgbClr val="22282E"/>
-                </a:solidFill>
-              </a:rPr>
-              <a:t>•  Curve25519/Ed25519 minimizan errores de implementación y no dependen de constantes de origen dudoso; muy recomendadas.</a:t>
-            </a:r>
-          </a:p>
-          <a:p>
-            <a:pPr>
-              <a:spcAft>
-                <a:spcPts val="600"/>
-              </a:spcAft>
-            </a:pPr>
-            <a:r>
-              <a:rPr sz="1500">
-                <a:solidFill>
-                  <a:srgbClr val="22282E"/>
-                </a:solidFill>
-              </a:rPr>
-              <a:t>•  ❓ ¿ECC resiste computación cuántica?</a:t>
-            </a:r>
-          </a:p>
-          <a:p>
-            <a:pPr>
-              <a:spcAft>
-                <a:spcPts val="600"/>
-              </a:spcAft>
-            </a:pPr>
-            <a:r>
-              <a:rPr sz="1500">
-                <a:solidFill>
-                  <a:srgbClr val="22282E"/>
-                </a:solidFill>
-              </a:rPr>
-              <a:t>•  No; como RSA, cae ante Shor. Por eso existe la criptografía post-cuántica (clase 062).</a:t>
+              <a:t>•  Implementa un mini protocolo de establecimiento de canal: dos partes hacen ECDH (X25519), derivan una clave con HKDF y la usan para cifrar un mensaje con AES-GCM. Criterio de aceptación: ambas partes…</a:t>
             </a:r>
           </a:p>
         </p:txBody>
@@ -3511,7 +3454,7 @@
                   <a:srgbClr val="0B3D2E"/>
                 </a:solidFill>
               </a:rPr>
-              <a:t>🔗 Referencias</a:t>
+              <a:t>⚠️ Errores comunes</a:t>
             </a:r>
           </a:p>
         </p:txBody>
@@ -3549,6 +3492,319 @@
                   <a:srgbClr val="22282E"/>
                 </a:solidFill>
               </a:rPr>
+              <a:t>•  Secretos ECDH distintos — Curvas o codificaciones distintas; usa la misma curva</a:t>
+            </a:r>
+          </a:p>
+          <a:p>
+            <a:pPr>
+              <a:spcAft>
+                <a:spcPts val="600"/>
+              </a:spcAft>
+            </a:pPr>
+            <a:r>
+              <a:rPr sz="1500">
+                <a:solidFill>
+                  <a:srgbClr val="22282E"/>
+                </a:solidFill>
+              </a:rPr>
+              <a:t>•  ECDSA roto por nonce reutilizado — Nonce k repetido revela la clave; usa RFC 6979 o Ed25519</a:t>
+            </a:r>
+          </a:p>
+          <a:p>
+            <a:pPr>
+              <a:spcAft>
+                <a:spcPts val="600"/>
+              </a:spcAft>
+            </a:pPr>
+            <a:r>
+              <a:rPr sz="1500">
+                <a:solidFill>
+                  <a:srgbClr val="22282E"/>
+                </a:solidFill>
+              </a:rPr>
+              <a:t>•  Punto público no validado — Riesgo de curva inválida; valida pertenencia a la curva</a:t>
+            </a:r>
+          </a:p>
+          <a:p>
+            <a:pPr>
+              <a:spcAft>
+                <a:spcPts val="600"/>
+              </a:spcAft>
+            </a:pPr>
+            <a:r>
+              <a:rPr sz="1500">
+                <a:solidFill>
+                  <a:srgbClr val="22282E"/>
+                </a:solidFill>
+              </a:rPr>
+              <a:t>•  Uso de curvas débiles/obsoletas — Elige P-256, P-384 o Curve25519</a:t>
+            </a:r>
+          </a:p>
+          <a:p>
+            <a:pPr>
+              <a:spcAft>
+                <a:spcPts val="600"/>
+              </a:spcAft>
+            </a:pPr>
+            <a:r>
+              <a:rPr sz="1500">
+                <a:solidFill>
+                  <a:srgbClr val="22282E"/>
+                </a:solidFill>
+              </a:rPr>
+              <a:t>•  Confundir clave de firma con clave de ECDH — Separa propósitos; no reutilices el par de claves</a:t>
+            </a:r>
+          </a:p>
+        </p:txBody>
+      </p:sp>
+    </p:spTree>
+  </p:cSld>
+  <p:clrMapOvr>
+    <a:masterClrMapping/>
+  </p:clrMapOvr>
+</p:sld>
+</file>
+
+<file path=ppt/slides/slide13.xml><?xml version="1.0" encoding="utf-8"?>
+<p:sld xmlns:a="http://schemas.openxmlformats.org/drawingml/2006/main" xmlns:p="http://schemas.openxmlformats.org/presentationml/2006/main" xmlns:r="http://schemas.openxmlformats.org/officeDocument/2006/relationships">
+  <p:cSld>
+    <p:spTree>
+      <p:nvGrpSpPr>
+        <p:cNvPr id="1" name=""/>
+        <p:cNvGrpSpPr/>
+        <p:nvPr/>
+      </p:nvGrpSpPr>
+      <p:grpSpPr/>
+      <p:sp>
+        <p:nvSpPr>
+          <p:cNvPr id="2" name="TextBox 1"/>
+          <p:cNvSpPr txBox="1"/>
+          <p:nvPr/>
+        </p:nvSpPr>
+        <p:spPr>
+          <a:xfrm>
+            <a:off x="457200" y="320040"/>
+            <a:ext cx="8229600" cy="822960"/>
+          </a:xfrm>
+          <a:prstGeom prst="rect">
+            <a:avLst/>
+          </a:prstGeom>
+          <a:noFill/>
+        </p:spPr>
+        <p:txBody>
+          <a:bodyPr wrap="square">
+            <a:spAutoFit/>
+          </a:bodyPr>
+          <a:lstStyle/>
+          <a:p>
+            <a:r>
+              <a:rPr sz="2600" b="1">
+                <a:solidFill>
+                  <a:srgbClr val="0B3D2E"/>
+                </a:solidFill>
+              </a:rPr>
+              <a:t>❓ Preguntas frecuentes</a:t>
+            </a:r>
+          </a:p>
+        </p:txBody>
+      </p:sp>
+      <p:sp>
+        <p:nvSpPr>
+          <p:cNvPr id="3" name="TextBox 2"/>
+          <p:cNvSpPr txBox="1"/>
+          <p:nvPr/>
+        </p:nvSpPr>
+        <p:spPr>
+          <a:xfrm>
+            <a:off x="457200" y="1280160"/>
+            <a:ext cx="8229600" cy="4937760"/>
+          </a:xfrm>
+          <a:prstGeom prst="rect">
+            <a:avLst/>
+          </a:prstGeom>
+          <a:noFill/>
+        </p:spPr>
+        <p:txBody>
+          <a:bodyPr wrap="square">
+            <a:spAutoFit/>
+          </a:bodyPr>
+          <a:lstStyle/>
+          <a:p>
+            <a:pPr>
+              <a:spcAft>
+                <a:spcPts val="600"/>
+              </a:spcAft>
+            </a:pPr>
+            <a:r>
+              <a:rPr sz="1500">
+                <a:solidFill>
+                  <a:srgbClr val="22282E"/>
+                </a:solidFill>
+              </a:rPr>
+              <a:t>•  ❓ ¿ECC o RSA?</a:t>
+            </a:r>
+          </a:p>
+          <a:p>
+            <a:pPr>
+              <a:spcAft>
+                <a:spcPts val="600"/>
+              </a:spcAft>
+            </a:pPr>
+            <a:r>
+              <a:rPr sz="1500">
+                <a:solidFill>
+                  <a:srgbClr val="22282E"/>
+                </a:solidFill>
+              </a:rPr>
+              <a:t>•  ECC para nuevos diseños: claves pequeñas, rápido, adoptado por TLS 1.3. RSA persiste por compatibilidad.</a:t>
+            </a:r>
+          </a:p>
+          <a:p>
+            <a:pPr>
+              <a:spcAft>
+                <a:spcPts val="600"/>
+              </a:spcAft>
+            </a:pPr>
+            <a:r>
+              <a:rPr sz="1500">
+                <a:solidFill>
+                  <a:srgbClr val="22282E"/>
+                </a:solidFill>
+              </a:rPr>
+              <a:t>•  ❓ ¿Curvas NIST o Curve25519?</a:t>
+            </a:r>
+          </a:p>
+          <a:p>
+            <a:pPr>
+              <a:spcAft>
+                <a:spcPts val="600"/>
+              </a:spcAft>
+            </a:pPr>
+            <a:r>
+              <a:rPr sz="1500">
+                <a:solidFill>
+                  <a:srgbClr val="22282E"/>
+                </a:solidFill>
+              </a:rPr>
+              <a:t>•  Curve25519/Ed25519 minimizan errores de implementación y no dependen de constantes de origen dudoso; muy recomendadas.</a:t>
+            </a:r>
+          </a:p>
+          <a:p>
+            <a:pPr>
+              <a:spcAft>
+                <a:spcPts val="600"/>
+              </a:spcAft>
+            </a:pPr>
+            <a:r>
+              <a:rPr sz="1500">
+                <a:solidFill>
+                  <a:srgbClr val="22282E"/>
+                </a:solidFill>
+              </a:rPr>
+              <a:t>•  ❓ ¿ECC resiste computación cuántica?</a:t>
+            </a:r>
+          </a:p>
+          <a:p>
+            <a:pPr>
+              <a:spcAft>
+                <a:spcPts val="600"/>
+              </a:spcAft>
+            </a:pPr>
+            <a:r>
+              <a:rPr sz="1500">
+                <a:solidFill>
+                  <a:srgbClr val="22282E"/>
+                </a:solidFill>
+              </a:rPr>
+              <a:t>•  No; como RSA, cae ante Shor. Por eso existe la criptografía post-cuántica (clase 062).</a:t>
+            </a:r>
+          </a:p>
+        </p:txBody>
+      </p:sp>
+    </p:spTree>
+  </p:cSld>
+  <p:clrMapOvr>
+    <a:masterClrMapping/>
+  </p:clrMapOvr>
+</p:sld>
+</file>
+
+<file path=ppt/slides/slide14.xml><?xml version="1.0" encoding="utf-8"?>
+<p:sld xmlns:a="http://schemas.openxmlformats.org/drawingml/2006/main" xmlns:p="http://schemas.openxmlformats.org/presentationml/2006/main" xmlns:r="http://schemas.openxmlformats.org/officeDocument/2006/relationships">
+  <p:cSld>
+    <p:spTree>
+      <p:nvGrpSpPr>
+        <p:cNvPr id="1" name=""/>
+        <p:cNvGrpSpPr/>
+        <p:nvPr/>
+      </p:nvGrpSpPr>
+      <p:grpSpPr/>
+      <p:sp>
+        <p:nvSpPr>
+          <p:cNvPr id="2" name="TextBox 1"/>
+          <p:cNvSpPr txBox="1"/>
+          <p:nvPr/>
+        </p:nvSpPr>
+        <p:spPr>
+          <a:xfrm>
+            <a:off x="457200" y="320040"/>
+            <a:ext cx="8229600" cy="822960"/>
+          </a:xfrm>
+          <a:prstGeom prst="rect">
+            <a:avLst/>
+          </a:prstGeom>
+          <a:noFill/>
+        </p:spPr>
+        <p:txBody>
+          <a:bodyPr wrap="square">
+            <a:spAutoFit/>
+          </a:bodyPr>
+          <a:lstStyle/>
+          <a:p>
+            <a:r>
+              <a:rPr sz="2600" b="1">
+                <a:solidFill>
+                  <a:srgbClr val="0B3D2E"/>
+                </a:solidFill>
+              </a:rPr>
+              <a:t>🔗 Referencias</a:t>
+            </a:r>
+          </a:p>
+        </p:txBody>
+      </p:sp>
+      <p:sp>
+        <p:nvSpPr>
+          <p:cNvPr id="3" name="TextBox 2"/>
+          <p:cNvSpPr txBox="1"/>
+          <p:nvPr/>
+        </p:nvSpPr>
+        <p:spPr>
+          <a:xfrm>
+            <a:off x="457200" y="1280160"/>
+            <a:ext cx="8229600" cy="4937760"/>
+          </a:xfrm>
+          <a:prstGeom prst="rect">
+            <a:avLst/>
+          </a:prstGeom>
+          <a:noFill/>
+        </p:spPr>
+        <p:txBody>
+          <a:bodyPr wrap="square">
+            <a:spAutoFit/>
+          </a:bodyPr>
+          <a:lstStyle/>
+          <a:p>
+            <a:pPr>
+              <a:spcAft>
+                <a:spcPts val="600"/>
+              </a:spcAft>
+            </a:pPr>
+            <a:r>
+              <a:rPr sz="1500">
+                <a:solidFill>
+                  <a:srgbClr val="22282E"/>
+                </a:solidFill>
+              </a:rPr>
               <a:t>•  Aumasson, Serious Cryptography, cap. 12.</a:t>
             </a:r>
           </a:p>
@@ -3599,6 +3855,81 @@
           </a:p>
         </p:txBody>
       </p:sp>
+    </p:spTree>
+  </p:cSld>
+  <p:clrMapOvr>
+    <a:masterClrMapping/>
+  </p:clrMapOvr>
+</p:sld>
+</file>
+
+<file path=ppt/slides/slide15.xml><?xml version="1.0" encoding="utf-8"?>
+<p:sld xmlns:a="http://schemas.openxmlformats.org/drawingml/2006/main" xmlns:p="http://schemas.openxmlformats.org/presentationml/2006/main" xmlns:r="http://schemas.openxmlformats.org/officeDocument/2006/relationships">
+  <p:cSld>
+    <p:spTree>
+      <p:nvGrpSpPr>
+        <p:cNvPr id="1" name=""/>
+        <p:cNvGrpSpPr/>
+        <p:nvPr/>
+      </p:nvGrpSpPr>
+      <p:grpSpPr/>
+      <p:sp>
+        <p:nvSpPr>
+          <p:cNvPr id="2" name="TextBox 1"/>
+          <p:cNvSpPr txBox="1"/>
+          <p:nvPr/>
+        </p:nvSpPr>
+        <p:spPr>
+          <a:xfrm>
+            <a:off x="457200" y="274320"/>
+            <a:ext cx="8229600" cy="640080"/>
+          </a:xfrm>
+          <a:prstGeom prst="rect">
+            <a:avLst/>
+          </a:prstGeom>
+          <a:noFill/>
+        </p:spPr>
+        <p:txBody>
+          <a:bodyPr wrap="square">
+            <a:spAutoFit/>
+          </a:bodyPr>
+          <a:lstStyle/>
+          <a:p>
+            <a:r>
+              <a:rPr sz="2200" b="1">
+                <a:solidFill>
+                  <a:srgbClr val="0B3D2E"/>
+                </a:solidFill>
+              </a:rPr>
+              <a:t>Diagrama de la clase</a:t>
+            </a:r>
+          </a:p>
+        </p:txBody>
+      </p:sp>
+      <p:pic>
+        <p:nvPicPr>
+          <p:cNvPr id="3" name="Picture 2" descr="baa93290480408fd.png"/>
+          <p:cNvPicPr>
+            <a:picLocks noChangeAspect="1"/>
+          </p:cNvPicPr>
+          <p:nvPr/>
+        </p:nvPicPr>
+        <p:blipFill>
+          <a:blip r:embed="rId2"/>
+          <a:stretch>
+            <a:fillRect/>
+          </a:stretch>
+        </p:blipFill>
+        <p:spPr>
+          <a:xfrm>
+            <a:off x="457200" y="2816352"/>
+            <a:ext cx="8229600" cy="1865376"/>
+          </a:xfrm>
+          <a:prstGeom prst="rect">
+            <a:avLst/>
+          </a:prstGeom>
+        </p:spPr>
+      </p:pic>
     </p:spTree>
   </p:cSld>
   <p:clrMapOvr>
@@ -3683,7 +4014,7 @@
                   <a:srgbClr val="22282E"/>
                 </a:solidFill>
               </a:rPr>
-              <a:t>•  Entender por qué la criptografía de curva elíptica logra la misma seguridad que RSA con claves mucho más pequeñas, en qué consiste el problema del logaritmo discreto sobre curvas elípticas (ECDLP), y cómo se usan las curvas modernas (P-256, Curve25519) para intercambio de claves (ECDH/X25519) y firma (ECDSA/Ed25519). El alumno generará claves EC con OpenSSL y comparará tamaños y rendimiento.</a:t>
+              <a:t>•  Entender por qué la criptografía de curva elíptica logra la misma seguridad que RSA con claves mucho más pequeñas, en qué consiste el problema del logaritmo discreto sobre curvas elípticas (ECDLP), y…</a:t>
             </a:r>
           </a:p>
         </p:txBody>
@@ -4077,7 +4408,7 @@
                   <a:srgbClr val="0B3D2E"/>
                 </a:solidFill>
               </a:rPr>
-              <a:t>📖 Definiciones y características</a:t>
+              <a:t>🧠 Explicación en profundidad</a:t>
             </a:r>
           </a:p>
         </p:txBody>
@@ -4115,97 +4446,97 @@
                   <a:srgbClr val="22282E"/>
                 </a:solidFill>
               </a:rPr>
-              <a:t>•  Curva elíptica: conjunto de puntos que satisfacen y² = x³ + ax + b sobre un campo finito, con una operación de grupo. Característica: permite cripto con claves pequeñas.</a:t>
-            </a:r>
-          </a:p>
-          <a:p>
-            <a:pPr>
-              <a:spcAft>
-                <a:spcPts val="600"/>
-              </a:spcAft>
-            </a:pPr>
-            <a:r>
-              <a:rPr sz="1500">
-                <a:solidFill>
-                  <a:srgbClr val="22282E"/>
-                </a:solidFill>
-              </a:rPr>
-              <a:t>•  Multiplicación escalar: Q = k·P (sumar P consigo mismo k veces). Fácil hacia adelante, difícil de invertir (ECDLP).</a:t>
-            </a:r>
-          </a:p>
-          <a:p>
-            <a:pPr>
-              <a:spcAft>
-                <a:spcPts val="600"/>
-              </a:spcAft>
-            </a:pPr>
-            <a:r>
-              <a:rPr sz="1500">
-                <a:solidFill>
-                  <a:srgbClr val="22282E"/>
-                </a:solidFill>
-              </a:rPr>
-              <a:t>•  ECDLP: dado P y Q = k·P, hallar k es computacionalmente inviable. Base de ECC.</a:t>
-            </a:r>
-          </a:p>
-          <a:p>
-            <a:pPr>
-              <a:spcAft>
-                <a:spcPts val="600"/>
-              </a:spcAft>
-            </a:pPr>
-            <a:r>
-              <a:rPr sz="1500">
-                <a:solidFill>
-                  <a:srgbClr val="22282E"/>
-                </a:solidFill>
-              </a:rPr>
-              <a:t>•  Curve25519 / X25519: curva de Bernstein optimizada para ECDH; rápida, segura y resistente a errores de implementación.</a:t>
-            </a:r>
-          </a:p>
-          <a:p>
-            <a:pPr>
-              <a:spcAft>
-                <a:spcPts val="600"/>
-              </a:spcAft>
-            </a:pPr>
-            <a:r>
-              <a:rPr sz="1500">
-                <a:solidFill>
-                  <a:srgbClr val="22282E"/>
-                </a:solidFill>
-              </a:rPr>
-              <a:t>•  Ed25519: esquema de firma sobre la curva Edwards25519; determinista y de alto rendimiento.</a:t>
-            </a:r>
-          </a:p>
-          <a:p>
-            <a:pPr>
-              <a:spcAft>
-                <a:spcPts val="600"/>
-              </a:spcAft>
-            </a:pPr>
-            <a:r>
-              <a:rPr sz="1500">
-                <a:solidFill>
-                  <a:srgbClr val="22282E"/>
-                </a:solidFill>
-              </a:rPr>
-              <a:t>•  P-256 (secp256r1): curva NIST muy usada en TLS y certificados.</a:t>
-            </a:r>
-          </a:p>
-          <a:p>
-            <a:pPr>
-              <a:spcAft>
-                <a:spcPts val="600"/>
-              </a:spcAft>
-            </a:pPr>
-            <a:r>
-              <a:rPr sz="1500">
-                <a:solidFill>
-                  <a:srgbClr val="22282E"/>
-                </a:solidFill>
-              </a:rPr>
-              <a:t>•  Cofactor y validación de puntos: verificar que un punto pertenece a la curva evita ataques de curva inválida.</a:t>
+              <a:t>•  La criptografía de curva elíptica resuelve el mismo problema que RSA con otra estructura</a:t>
+            </a:r>
+          </a:p>
+          <a:p>
+            <a:pPr>
+              <a:spcAft>
+                <a:spcPts val="600"/>
+              </a:spcAft>
+            </a:pPr>
+            <a:r>
+              <a:rPr sz="1500">
+                <a:solidFill>
+                  <a:srgbClr val="22282E"/>
+                </a:solidFill>
+              </a:rPr>
+              <a:t>•  matemática, y su ventaja es puramente cuantitativa pero decisiva: una clave ECC de 256</a:t>
+            </a:r>
+          </a:p>
+          <a:p>
+            <a:pPr>
+              <a:spcAft>
+                <a:spcPts val="600"/>
+              </a:spcAft>
+            </a:pPr>
+            <a:r>
+              <a:rPr sz="1500">
+                <a:solidFill>
+                  <a:srgbClr val="22282E"/>
+                </a:solidFill>
+              </a:rPr>
+              <a:t>•  bits ofrece aproximadamente la seguridad de una RSA de 3072 bits. Claves más cortas</a:t>
+            </a:r>
+          </a:p>
+          <a:p>
+            <a:pPr>
+              <a:spcAft>
+                <a:spcPts val="600"/>
+              </a:spcAft>
+            </a:pPr>
+            <a:r>
+              <a:rPr sz="1500">
+                <a:solidFill>
+                  <a:srgbClr val="22282E"/>
+                </a:solidFill>
+              </a:rPr>
+              <a:t>•  significan firmas más pequeñas, handshakes más rápidos, menos ancho de banda y menos</a:t>
+            </a:r>
+          </a:p>
+          <a:p>
+            <a:pPr>
+              <a:spcAft>
+                <a:spcPts val="600"/>
+              </a:spcAft>
+            </a:pPr>
+            <a:r>
+              <a:rPr sz="1500">
+                <a:solidFill>
+                  <a:srgbClr val="22282E"/>
+                </a:solidFill>
+              </a:rPr>
+              <a:t>•  consumo, lo que importa mucho en móviles, IoT y en cada conexión TLS del planeta. Por eso</a:t>
+            </a:r>
+          </a:p>
+          <a:p>
+            <a:pPr>
+              <a:spcAft>
+                <a:spcPts val="600"/>
+              </a:spcAft>
+            </a:pPr>
+            <a:r>
+              <a:rPr sz="1500">
+                <a:solidFill>
+                  <a:srgbClr val="22282E"/>
+                </a:solidFill>
+              </a:rPr>
+              <a:t>•  ECC es hoy el valor por defecto y RSA el legado que se mantiene por compatibilidad.</a:t>
+            </a:r>
+          </a:p>
+          <a:p>
+            <a:pPr>
+              <a:spcAft>
+                <a:spcPts val="600"/>
+              </a:spcAft>
+            </a:pPr>
+            <a:r>
+              <a:rPr sz="1500">
+                <a:solidFill>
+                  <a:srgbClr val="22282E"/>
+                </a:solidFill>
+              </a:rPr>
+              <a:t>•  La estructura es una curva elíptica sobre un campo finito: el conjunto de puntos que</a:t>
             </a:r>
           </a:p>
         </p:txBody>
@@ -4256,7 +4587,7 @@
                   <a:srgbClr val="0B3D2E"/>
                 </a:solidFill>
               </a:rPr>
-              <a:t>🧰 Herramientas y preparación</a:t>
+              <a:t>📖 Definiciones y características</a:t>
             </a:r>
           </a:p>
         </p:txBody>
@@ -4294,52 +4625,97 @@
                   <a:srgbClr val="22282E"/>
                 </a:solidFill>
               </a:rPr>
-              <a:t>•  openssl version</a:t>
-            </a:r>
-          </a:p>
-          <a:p>
-            <a:pPr>
-              <a:spcAft>
-                <a:spcPts val="600"/>
-              </a:spcAft>
-            </a:pPr>
-            <a:r>
-              <a:rPr sz="1500">
-                <a:solidFill>
-                  <a:srgbClr val="22282E"/>
-                </a:solidFill>
-              </a:rPr>
-              <a:t>•  openssl ecparam -listcurves | head</a:t>
-            </a:r>
-          </a:p>
-          <a:p>
-            <a:pPr>
-              <a:spcAft>
-                <a:spcPts val="600"/>
-              </a:spcAft>
-            </a:pPr>
-            <a:r>
-              <a:rPr sz="1500">
-                <a:solidFill>
-                  <a:srgbClr val="22282E"/>
-                </a:solidFill>
-              </a:rPr>
-              <a:t>•  pip install cryptography</a:t>
-            </a:r>
-          </a:p>
-          <a:p>
-            <a:pPr>
-              <a:spcAft>
-                <a:spcPts val="600"/>
-              </a:spcAft>
-            </a:pPr>
-            <a:r>
-              <a:rPr sz="1500">
-                <a:solidFill>
-                  <a:srgbClr val="22282E"/>
-                </a:solidFill>
-              </a:rPr>
-              <a:t>•  Entorno de laboratorio propio. La generación de claves es local.</a:t>
+              <a:t>•  Curva elíptica: conjunto de puntos que satisfacen y² = x³ + ax + b sobre un campo finito, con una operación de grupo. Característica: permite cripto con claves pequeñas.</a:t>
+            </a:r>
+          </a:p>
+          <a:p>
+            <a:pPr>
+              <a:spcAft>
+                <a:spcPts val="600"/>
+              </a:spcAft>
+            </a:pPr>
+            <a:r>
+              <a:rPr sz="1500">
+                <a:solidFill>
+                  <a:srgbClr val="22282E"/>
+                </a:solidFill>
+              </a:rPr>
+              <a:t>•  Multiplicación escalar: Q = k·P (sumar P consigo mismo k veces). Fácil hacia adelante, difícil de invertir (ECDLP).</a:t>
+            </a:r>
+          </a:p>
+          <a:p>
+            <a:pPr>
+              <a:spcAft>
+                <a:spcPts val="600"/>
+              </a:spcAft>
+            </a:pPr>
+            <a:r>
+              <a:rPr sz="1500">
+                <a:solidFill>
+                  <a:srgbClr val="22282E"/>
+                </a:solidFill>
+              </a:rPr>
+              <a:t>•  ECDLP: dado P y Q = k·P, hallar k es computacionalmente inviable. Base de ECC.</a:t>
+            </a:r>
+          </a:p>
+          <a:p>
+            <a:pPr>
+              <a:spcAft>
+                <a:spcPts val="600"/>
+              </a:spcAft>
+            </a:pPr>
+            <a:r>
+              <a:rPr sz="1500">
+                <a:solidFill>
+                  <a:srgbClr val="22282E"/>
+                </a:solidFill>
+              </a:rPr>
+              <a:t>•  Curve25519 / X25519: curva de Bernstein optimizada para ECDH; rápida, segura y resistente a errores de implementación.</a:t>
+            </a:r>
+          </a:p>
+          <a:p>
+            <a:pPr>
+              <a:spcAft>
+                <a:spcPts val="600"/>
+              </a:spcAft>
+            </a:pPr>
+            <a:r>
+              <a:rPr sz="1500">
+                <a:solidFill>
+                  <a:srgbClr val="22282E"/>
+                </a:solidFill>
+              </a:rPr>
+              <a:t>•  Ed25519: esquema de firma sobre la curva Edwards25519; determinista y de alto rendimiento.</a:t>
+            </a:r>
+          </a:p>
+          <a:p>
+            <a:pPr>
+              <a:spcAft>
+                <a:spcPts val="600"/>
+              </a:spcAft>
+            </a:pPr>
+            <a:r>
+              <a:rPr sz="1500">
+                <a:solidFill>
+                  <a:srgbClr val="22282E"/>
+                </a:solidFill>
+              </a:rPr>
+              <a:t>•  P-256 (secp256r1): curva NIST muy usada en TLS y certificados.</a:t>
+            </a:r>
+          </a:p>
+          <a:p>
+            <a:pPr>
+              <a:spcAft>
+                <a:spcPts val="600"/>
+              </a:spcAft>
+            </a:pPr>
+            <a:r>
+              <a:rPr sz="1500">
+                <a:solidFill>
+                  <a:srgbClr val="22282E"/>
+                </a:solidFill>
+              </a:rPr>
+              <a:t>•  Cofactor y validación de puntos: verificar que un punto pertenece a la curva evita ataques de curva inválida.</a:t>
             </a:r>
           </a:p>
         </p:txBody>
@@ -4390,7 +4766,7 @@
                   <a:srgbClr val="0B3D2E"/>
                 </a:solidFill>
               </a:rPr>
-              <a:t>🧪 Laboratorio guiado</a:t>
+              <a:t>📔 Glosario</a:t>
             </a:r>
           </a:p>
         </p:txBody>
@@ -4428,97 +4804,97 @@
                   <a:srgbClr val="22282E"/>
                 </a:solidFill>
               </a:rPr>
-              <a:t>•  Genera una clave EC P-256:</a:t>
-            </a:r>
-          </a:p>
-          <a:p>
-            <a:pPr>
-              <a:spcAft>
-                <a:spcPts val="600"/>
-              </a:spcAft>
-            </a:pPr>
-            <a:r>
-              <a:rPr sz="1500">
-                <a:solidFill>
-                  <a:srgbClr val="22282E"/>
-                </a:solidFill>
-              </a:rPr>
-              <a:t>•  openssl ecparam -name prime256v1 -genkey -noout -out ecpriv.pem</a:t>
-            </a:r>
-          </a:p>
-          <a:p>
-            <a:pPr>
-              <a:spcAft>
-                <a:spcPts val="600"/>
-              </a:spcAft>
-            </a:pPr>
-            <a:r>
-              <a:rPr sz="1500">
-                <a:solidFill>
-                  <a:srgbClr val="22282E"/>
-                </a:solidFill>
-              </a:rPr>
-              <a:t>•  openssl ec -in ecpriv.pem -pubout -out ecpub.pem</a:t>
-            </a:r>
-          </a:p>
-          <a:p>
-            <a:pPr>
-              <a:spcAft>
-                <a:spcPts val="600"/>
-              </a:spcAft>
-            </a:pPr>
-            <a:r>
-              <a:rPr sz="1500">
-                <a:solidFill>
-                  <a:srgbClr val="22282E"/>
-                </a:solidFill>
-              </a:rPr>
-              <a:t>•  openssl ec -in ecpriv.pem -text -noout | head</a:t>
-            </a:r>
-          </a:p>
-          <a:p>
-            <a:pPr>
-              <a:spcAft>
-                <a:spcPts val="600"/>
-              </a:spcAft>
-            </a:pPr>
-            <a:r>
-              <a:rPr sz="1500">
-                <a:solidFill>
-                  <a:srgbClr val="22282E"/>
-                </a:solidFill>
-              </a:rPr>
-              <a:t>•  Compara tamaños: observa que una clave EC de 256 bits equivale en seguridad a una RSA de 3072 bits; la clave EC es mucho más compacta.</a:t>
-            </a:r>
-          </a:p>
-          <a:p>
-            <a:pPr>
-              <a:spcAft>
-                <a:spcPts val="600"/>
-              </a:spcAft>
-            </a:pPr>
-            <a:r>
-              <a:rPr sz="1500">
-                <a:solidFill>
-                  <a:srgbClr val="22282E"/>
-                </a:solidFill>
-              </a:rPr>
-              <a:t>•  ECDH con X25519 en Python (dos partes derivan el mismo secreto):</a:t>
-            </a:r>
-          </a:p>
-          <a:p>
-            <a:pPr>
-              <a:spcAft>
-                <a:spcPts val="600"/>
-              </a:spcAft>
-            </a:pPr>
-            <a:r>
-              <a:rPr sz="1500">
-                <a:solidFill>
-                  <a:srgbClr val="22282E"/>
-                </a:solidFill>
-              </a:rPr>
-              <a:t>•  from cryptography.hazmat.primitives.asymmetric.x25519 import X25519PrivateKey</a:t>
+              <a:t>•  Término — Definición concisa</a:t>
+            </a:r>
+          </a:p>
+          <a:p>
+            <a:pPr>
+              <a:spcAft>
+                <a:spcPts val="600"/>
+              </a:spcAft>
+            </a:pPr>
+            <a:r>
+              <a:rPr sz="1500">
+                <a:solidFill>
+                  <a:srgbClr val="22282E"/>
+                </a:solidFill>
+              </a:rPr>
+              <a:t>•  Curva elíptica — Conjunto de puntos que cumplen y² = x³ + ax + b sobre un campo finito</a:t>
+            </a:r>
+          </a:p>
+          <a:p>
+            <a:pPr>
+              <a:spcAft>
+                <a:spcPts val="600"/>
+              </a:spcAft>
+            </a:pPr>
+            <a:r>
+              <a:rPr sz="1500">
+                <a:solidFill>
+                  <a:srgbClr val="22282E"/>
+                </a:solidFill>
+              </a:rPr>
+              <a:t>•  Campo finito — Aritmética modular sobre un primo, donde vive la curva</a:t>
+            </a:r>
+          </a:p>
+          <a:p>
+            <a:pPr>
+              <a:spcAft>
+                <a:spcPts val="600"/>
+              </a:spcAft>
+            </a:pPr>
+            <a:r>
+              <a:rPr sz="1500">
+                <a:solidFill>
+                  <a:srgbClr val="22282E"/>
+                </a:solidFill>
+              </a:rPr>
+              <a:t>•  Punto generador G — Punto base público fijado por los parámetros de la curva</a:t>
+            </a:r>
+          </a:p>
+          <a:p>
+            <a:pPr>
+              <a:spcAft>
+                <a:spcPts val="600"/>
+              </a:spcAft>
+            </a:pPr>
+            <a:r>
+              <a:rPr sz="1500">
+                <a:solidFill>
+                  <a:srgbClr val="22282E"/>
+                </a:solidFill>
+              </a:rPr>
+              <a:t>•  Multiplicación escalar — Sumar G consigo mismo k veces; operación fundamental</a:t>
+            </a:r>
+          </a:p>
+          <a:p>
+            <a:pPr>
+              <a:spcAft>
+                <a:spcPts val="600"/>
+              </a:spcAft>
+            </a:pPr>
+            <a:r>
+              <a:rPr sz="1500">
+                <a:solidFill>
+                  <a:srgbClr val="22282E"/>
+                </a:solidFill>
+              </a:rPr>
+              <a:t>•  ECDLP — Hallar k conocidos G y k·G; base de la seguridad</a:t>
+            </a:r>
+          </a:p>
+          <a:p>
+            <a:pPr>
+              <a:spcAft>
+                <a:spcPts val="600"/>
+              </a:spcAft>
+            </a:pPr>
+            <a:r>
+              <a:rPr sz="1500">
+                <a:solidFill>
+                  <a:srgbClr val="22282E"/>
+                </a:solidFill>
+              </a:rPr>
+              <a:t>•  Curvas NIST (P-256…) — Estándares extendidos; parámetros de origen discutido</a:t>
             </a:r>
           </a:p>
         </p:txBody>
@@ -4569,7 +4945,7 @@
                   <a:srgbClr val="0B3D2E"/>
                 </a:solidFill>
               </a:rPr>
-              <a:t>✍️ Ejercicios</a:t>
+              <a:t>🧰 Herramientas y preparación</a:t>
             </a:r>
           </a:p>
         </p:txBody>
@@ -4607,82 +4983,7 @@
                   <a:srgbClr val="22282E"/>
                 </a:solidFill>
               </a:rPr>
-              <a:t>•  Explica con un dibujo la suma de dos puntos en una curva sobre los reales.</a:t>
-            </a:r>
-          </a:p>
-          <a:p>
-            <a:pPr>
-              <a:spcAft>
-                <a:spcPts val="600"/>
-              </a:spcAft>
-            </a:pPr>
-            <a:r>
-              <a:rPr sz="1500">
-                <a:solidFill>
-                  <a:srgbClr val="22282E"/>
-                </a:solidFill>
-              </a:rPr>
-              <a:t>•  ¿Por qué claves EC más pequeñas dan la misma seguridad que RSA grandes?</a:t>
-            </a:r>
-          </a:p>
-          <a:p>
-            <a:pPr>
-              <a:spcAft>
-                <a:spcPts val="600"/>
-              </a:spcAft>
-            </a:pPr>
-            <a:r>
-              <a:rPr sz="1500">
-                <a:solidFill>
-                  <a:srgbClr val="22282E"/>
-                </a:solidFill>
-              </a:rPr>
-              <a:t>•  Genera un secreto compartido con X25519 entre dos pares y verifica que coinciden.</a:t>
-            </a:r>
-          </a:p>
-          <a:p>
-            <a:pPr>
-              <a:spcAft>
-                <a:spcPts val="600"/>
-              </a:spcAft>
-            </a:pPr>
-            <a:r>
-              <a:rPr sz="1500">
-                <a:solidFill>
-                  <a:srgbClr val="22282E"/>
-                </a:solidFill>
-              </a:rPr>
-              <a:t>•  Investiga la polémica de la curva DualECDRBG y la confianza en parámetros.</a:t>
-            </a:r>
-          </a:p>
-          <a:p>
-            <a:pPr>
-              <a:spcAft>
-                <a:spcPts val="600"/>
-              </a:spcAft>
-            </a:pPr>
-            <a:r>
-              <a:rPr sz="1500">
-                <a:solidFill>
-                  <a:srgbClr val="22282E"/>
-                </a:solidFill>
-              </a:rPr>
-              <a:t>•  Compara Ed25519 con ECDSA en cuanto a determinismo y riesgo de nonce.</a:t>
-            </a:r>
-          </a:p>
-          <a:p>
-            <a:pPr>
-              <a:spcAft>
-                <a:spcPts val="600"/>
-              </a:spcAft>
-            </a:pPr>
-            <a:r>
-              <a:rPr sz="1500">
-                <a:solidFill>
-                  <a:srgbClr val="22282E"/>
-                </a:solidFill>
-              </a:rPr>
-              <a:t>•  ¿Por qué validar puntos recibidos evita ataques de curva inválida?</a:t>
+              <a:t>•  Entorno de laboratorio propio. La generación de claves es local.</a:t>
             </a:r>
           </a:p>
         </p:txBody>
@@ -4733,7 +5034,7 @@
                   <a:srgbClr val="0B3D2E"/>
                 </a:solidFill>
               </a:rPr>
-              <a:t>📝 Reto verificable</a:t>
+              <a:t>🧪 Laboratorio guiado</a:t>
             </a:r>
           </a:p>
         </p:txBody>
@@ -4771,7 +5072,67 @@
                   <a:srgbClr val="22282E"/>
                 </a:solidFill>
               </a:rPr>
-              <a:t>•  Implementa un mini protocolo de establecimiento de canal: dos partes hacen ECDH (X25519), derivan una clave con HKDF y la usan para cifrar un mensaje con AES-GCM. Criterio de aceptación: ambas partes descifran el mensaje del otro y un tercero que solo ve las claves públicas no puede.</a:t>
+              <a:t>•  Genera una clave EC P-256:</a:t>
+            </a:r>
+          </a:p>
+          <a:p>
+            <a:pPr>
+              <a:spcAft>
+                <a:spcPts val="600"/>
+              </a:spcAft>
+            </a:pPr>
+            <a:r>
+              <a:rPr sz="1500">
+                <a:solidFill>
+                  <a:srgbClr val="22282E"/>
+                </a:solidFill>
+              </a:rPr>
+              <a:t>•  Compara tamaños: observa que una clave EC de 256 bits equivale en seguridad a una RSA de 3072 bits; la clave EC es mucho más compacta.</a:t>
+            </a:r>
+          </a:p>
+          <a:p>
+            <a:pPr>
+              <a:spcAft>
+                <a:spcPts val="600"/>
+              </a:spcAft>
+            </a:pPr>
+            <a:r>
+              <a:rPr sz="1500">
+                <a:solidFill>
+                  <a:srgbClr val="22282E"/>
+                </a:solidFill>
+              </a:rPr>
+              <a:t>•  ECDH con X25519 en Python (dos partes derivan el mismo secreto):</a:t>
+            </a:r>
+          </a:p>
+          <a:p>
+            <a:pPr>
+              <a:spcAft>
+                <a:spcPts val="600"/>
+              </a:spcAft>
+            </a:pPr>
+            <a:r>
+              <a:rPr sz="1500">
+                <a:solidFill>
+                  <a:srgbClr val="22282E"/>
+                </a:solidFill>
+              </a:rPr>
+              <a:t>•  Firma con Ed25519:</a:t>
+            </a:r>
+          </a:p>
+          <a:p>
+            <a:pPr>
+              <a:spcAft>
+                <a:spcPts val="600"/>
+              </a:spcAft>
+            </a:pPr>
+            <a:r>
+              <a:rPr sz="1500">
+                <a:solidFill>
+                  <a:srgbClr val="22282E"/>
+                </a:solidFill>
+              </a:rPr>
+              <a:t>•  Benchmark. Mide operaciones/segundo de ECDSA P-256 vs firma RSA-3072 con openssl speed.</a:t>
             </a:r>
           </a:p>
         </p:txBody>
